--- a/docs/design/dist/d08-verify-plan.pptx
+++ b/docs/design/dist/d08-verify-plan.pptx
@@ -3233,7 +3233,7 @@
                 <a:ea typeface="Pretendard"/>
                 <a:cs typeface="Pretendard"/>
               </a:rPr>
-              <a:t>KDMS-D08 · v0.1 · 2026-10-09</a:t>
+              <a:t>KDMS-D08 · v0.2 · 2026-10-10</a:t>
             </a:r>
           </a:p>
         </p:txBody>
@@ -10678,7 +10678,7 @@
                 <a:ea typeface="Pretendard"/>
                 <a:cs typeface="Pretendard"/>
               </a:rPr>
-              <a:t>폐쇄망 3개</a:t>
+              <a:t>폐쇄망 3개 (6단계)</a:t>
             </a:r>
           </a:p>
         </p:txBody>
